--- a/index/designs/y8-l8/l8-consolidation/l8-consolidation.pptx
+++ b/index/designs/y8-l8/l8-consolidation/l8-consolidation.pptx
@@ -2020,12 +2020,6 @@
               </a:rPr>
               <a:t>运动</a:t>
             </a:r>
-            <a:pPr algn="ctr" indent="0" marL="0">
-              <a:spcBef>
-                <a:spcPts val="1400"/>
-              </a:spcBef>
-              <a:buNone/>
-            </a:pPr>
             <a:r>
               <a:rPr lang="en-US" sz="5200" b="1" dirty="0">
                 <a:solidFill>
@@ -2479,12 +2473,6 @@
               </a:rPr>
               <a:t>Teacher projects </a:t>
             </a:r>
-            <a:pPr algn="l" indent="0" marL="0">
-              <a:lnSpc>
-                <a:spcPts val="1680"/>
-              </a:lnSpc>
-              <a:buNone/>
-            </a:pPr>
             <a:r>
               <a:rPr lang="en-US" sz="1200" b="1" dirty="0">
                 <a:solidFill>
@@ -2496,12 +2484,6 @@
               </a:rPr>
               <a:t>4 words at a time</a:t>
             </a:r>
-            <a:pPr algn="l" indent="0" marL="0">
-              <a:lnSpc>
-                <a:spcPts val="1680"/>
-              </a:lnSpc>
-              <a:buNone/>
-            </a:pPr>
             <a:r>
               <a:rPr lang="en-US" sz="1200" dirty="0">
                 <a:solidFill>
@@ -2513,12 +2495,6 @@
               </a:rPr>
               <a:t> — 3 from one category, 1 from another. Students </a:t>
             </a:r>
-            <a:pPr algn="l" indent="0" marL="0">
-              <a:lnSpc>
-                <a:spcPts val="1680"/>
-              </a:lnSpc>
-              <a:buNone/>
-            </a:pPr>
             <a:r>
               <a:rPr lang="en-US" sz="1200" b="1" dirty="0">
                 <a:solidFill>
@@ -2530,12 +2506,6 @@
               </a:rPr>
               <a:t>identify and explain</a:t>
             </a:r>
-            <a:pPr algn="l" indent="0" marL="0">
-              <a:lnSpc>
-                <a:spcPts val="1680"/>
-              </a:lnSpc>
-              <a:buNone/>
-            </a:pPr>
             <a:r>
               <a:rPr lang="en-US" sz="1200" dirty="0">
                 <a:solidFill>
@@ -3328,12 +3298,6 @@
               </a:rPr>
               <a:t>Rounds 2–5</a:t>
             </a:r>
-            <a:pPr algn="l" indent="0" marL="0">
-              <a:lnSpc>
-                <a:spcPts val="1470"/>
-              </a:lnSpc>
-              <a:buNone/>
-            </a:pPr>
             <a:r>
               <a:rPr lang="en-US" sz="1050" dirty="0">
                 <a:solidFill>
@@ -3891,15 +3855,6 @@
               </a:rPr>
               <a:t>1</a:t>
             </a:r>
-            <a:pPr algn="l" indent="0" marL="0">
-              <a:lnSpc>
-                <a:spcPts val="1875"/>
-              </a:lnSpc>
-              <a:spcBef>
-                <a:spcPts val="800"/>
-              </a:spcBef>
-              <a:buNone/>
-            </a:pPr>
             <a:r>
               <a:rPr lang="en-US" sz="1250" dirty="0">
                 <a:solidFill>
@@ -3911,15 +3866,6 @@
               </a:rPr>
               <a:t>Translate the </a:t>
             </a:r>
-            <a:pPr algn="l" indent="0" marL="0">
-              <a:lnSpc>
-                <a:spcPts val="1875"/>
-              </a:lnSpc>
-              <a:spcBef>
-                <a:spcPts val="800"/>
-              </a:spcBef>
-              <a:buNone/>
-            </a:pPr>
             <a:r>
               <a:rPr lang="en-US" sz="1250" b="1" dirty="0">
                 <a:solidFill>
@@ -3931,15 +3877,6 @@
               </a:rPr>
               <a:t>4 key Test 3.2 sentences</a:t>
             </a:r>
-            <a:pPr algn="l" indent="0" marL="0">
-              <a:lnSpc>
-                <a:spcPts val="1875"/>
-              </a:lnSpc>
-              <a:spcBef>
-                <a:spcPts val="800"/>
-              </a:spcBef>
-              <a:buNone/>
-            </a:pPr>
             <a:r>
               <a:rPr lang="en-US" sz="1250" dirty="0">
                 <a:solidFill>
@@ -4071,15 +4008,6 @@
               </a:rPr>
               <a:t>2</a:t>
             </a:r>
-            <a:pPr algn="l" indent="0" marL="0">
-              <a:lnSpc>
-                <a:spcPts val="1875"/>
-              </a:lnSpc>
-              <a:spcBef>
-                <a:spcPts val="800"/>
-              </a:spcBef>
-              <a:buNone/>
-            </a:pPr>
             <a:r>
               <a:rPr lang="en-US" sz="1250" dirty="0">
                 <a:solidFill>
@@ -4091,15 +4019,6 @@
               </a:rPr>
               <a:t>Fill in </a:t>
             </a:r>
-            <a:pPr algn="l" indent="0" marL="0">
-              <a:lnSpc>
-                <a:spcPts val="1875"/>
-              </a:lnSpc>
-              <a:spcBef>
-                <a:spcPts val="800"/>
-              </a:spcBef>
-              <a:buNone/>
-            </a:pPr>
             <a:r>
               <a:rPr lang="en-US" sz="1250" b="1" dirty="0">
                 <a:solidFill>
@@ -4111,15 +4030,6 @@
               </a:rPr>
               <a:t>6 vocabulary gaps</a:t>
             </a:r>
-            <a:pPr algn="l" indent="0" marL="0">
-              <a:lnSpc>
-                <a:spcPts val="1875"/>
-              </a:lnSpc>
-              <a:spcBef>
-                <a:spcPts val="800"/>
-              </a:spcBef>
-              <a:buNone/>
-            </a:pPr>
             <a:r>
               <a:rPr lang="en-US" sz="1250" dirty="0">
                 <a:solidFill>
@@ -4287,12 +4197,6 @@
               </a:rPr>
               <a:t>Use </a:t>
             </a:r>
-            <a:pPr algn="l" indent="0" marL="0">
-              <a:spcBef>
-                <a:spcPts val="200"/>
-              </a:spcBef>
-              <a:buNone/>
-            </a:pPr>
             <a:r>
               <a:rPr lang="en-US" sz="950" b="1" dirty="0">
                 <a:solidFill>
@@ -4304,12 +4208,6 @@
               </a:rPr>
               <a:t>差不多每天都</a:t>
             </a:r>
-            <a:pPr algn="l" indent="0" marL="0">
-              <a:spcBef>
-                <a:spcPts val="200"/>
-              </a:spcBef>
-              <a:buNone/>
-            </a:pPr>
             <a:r>
               <a:rPr lang="en-US" sz="950" dirty="0">
                 <a:solidFill>
@@ -4321,12 +4219,6 @@
               </a:rPr>
               <a:t> or </a:t>
             </a:r>
-            <a:pPr algn="l" indent="0" marL="0">
-              <a:spcBef>
-                <a:spcPts val="200"/>
-              </a:spcBef>
-              <a:buNone/>
-            </a:pPr>
             <a:r>
               <a:rPr lang="en-US" sz="950" b="1" dirty="0">
                 <a:solidFill>
@@ -5491,15 +5383,6 @@
               </a:rPr>
               <a:t>Traffic-light your confidence</a:t>
             </a:r>
-            <a:pPr algn="l" indent="0" marL="0">
-              <a:lnSpc>
-                <a:spcPts val="1425"/>
-              </a:lnSpc>
-              <a:spcBef>
-                <a:spcPts val="1000"/>
-              </a:spcBef>
-              <a:buNone/>
-            </a:pPr>
             <a:r>
               <a:rPr lang="en-US" sz="950" dirty="0">
                 <a:solidFill>
@@ -6565,6 +6448,53 @@
               </a:rPr>
               <a:t>1. Teacher shows a </a:t>
             </a:r>
+            <a:r>
+              <a:rPr lang="en-US" sz="1200" b="1" dirty="0">
+                <a:solidFill>
+                  <a:srgbClr val="1E2A38"/>
+                </a:solidFill>
+                <a:latin typeface="Noto Sans SC" pitchFamily="34" charset="0"/>
+                <a:ea typeface="Noto Sans SC" pitchFamily="34" charset="-122"/>
+                <a:cs typeface="Noto Sans SC" pitchFamily="34" charset="-120"/>
+              </a:rPr>
+              <a:t>word from any of the 7 previous lessons</a:t>
+            </a:r>
+            <a:r>
+              <a:rPr lang="en-US" sz="1200" dirty="0">
+                <a:solidFill>
+                  <a:srgbClr val="5B6677"/>
+                </a:solidFill>
+                <a:latin typeface="Noto Sans SC" pitchFamily="34" charset="0"/>
+                <a:ea typeface="Noto Sans SC" pitchFamily="34" charset="-122"/>
+                <a:cs typeface="Noto Sans SC" pitchFamily="34" charset="-120"/>
+              </a:rPr>
+              <a:t> on the projector</a:t>
+            </a:r>
+            <a:endParaRPr lang="en-US" sz="1200" dirty="0"/>
+          </a:p>
+        </p:txBody>
+      </p:sp>
+      <p:sp>
+        <p:nvSpPr>
+          <p:cNvPr id="10" name="Text 8"/>
+          <p:cNvSpPr/>
+          <p:nvPr/>
+        </p:nvSpPr>
+        <p:spPr>
+          <a:xfrm>
+            <a:off x="644426" y="2521595"/>
+            <a:ext cx="5188229" cy="426541"/>
+          </a:xfrm>
+          <a:prstGeom prst="rect">
+            <a:avLst/>
+          </a:prstGeom>
+          <a:noFill/>
+          <a:ln/>
+        </p:spPr>
+        <p:txBody>
+          <a:bodyPr wrap="square" lIns="0" tIns="0" rIns="0" bIns="0" rtlCol="0" anchor="t"/>
+          <a:lstStyle/>
+          <a:p>
             <a:pPr algn="l" indent="0" marL="0">
               <a:lnSpc>
                 <a:spcPts val="1680"/>
@@ -6572,6 +6502,17 @@
               <a:buNone/>
             </a:pPr>
             <a:r>
+              <a:rPr lang="en-US" sz="1200" dirty="0">
+                <a:solidFill>
+                  <a:srgbClr val="5B6677"/>
+                </a:solidFill>
+                <a:latin typeface="Noto Sans SC" pitchFamily="34" charset="0"/>
+                <a:ea typeface="Noto Sans SC" pitchFamily="34" charset="-122"/>
+                <a:cs typeface="Noto Sans SC" pitchFamily="34" charset="-120"/>
+              </a:rPr>
+              <a:t>2. Class </a:t>
+            </a:r>
+            <a:r>
               <a:rPr lang="en-US" sz="1200" b="1" dirty="0">
                 <a:solidFill>
                   <a:srgbClr val="1E2A38"/>
@@ -6580,90 +6521,8 @@
                 <a:ea typeface="Noto Sans SC" pitchFamily="34" charset="-122"/>
                 <a:cs typeface="Noto Sans SC" pitchFamily="34" charset="-120"/>
               </a:rPr>
-              <a:t>word from any of the 7 previous lessons</a:t>
-            </a:r>
-            <a:pPr algn="l" indent="0" marL="0">
-              <a:lnSpc>
-                <a:spcPts val="1680"/>
-              </a:lnSpc>
-              <a:buNone/>
-            </a:pPr>
-            <a:r>
-              <a:rPr lang="en-US" sz="1200" dirty="0">
-                <a:solidFill>
-                  <a:srgbClr val="5B6677"/>
-                </a:solidFill>
-                <a:latin typeface="Noto Sans SC" pitchFamily="34" charset="0"/>
-                <a:ea typeface="Noto Sans SC" pitchFamily="34" charset="-122"/>
-                <a:cs typeface="Noto Sans SC" pitchFamily="34" charset="-120"/>
-              </a:rPr>
-              <a:t> on the projector</a:t>
-            </a:r>
-            <a:endParaRPr lang="en-US" sz="1200" dirty="0"/>
-          </a:p>
-        </p:txBody>
-      </p:sp>
-      <p:sp>
-        <p:nvSpPr>
-          <p:cNvPr id="10" name="Text 8"/>
-          <p:cNvSpPr/>
-          <p:nvPr/>
-        </p:nvSpPr>
-        <p:spPr>
-          <a:xfrm>
-            <a:off x="644426" y="2521595"/>
-            <a:ext cx="5188229" cy="426541"/>
-          </a:xfrm>
-          <a:prstGeom prst="rect">
-            <a:avLst/>
-          </a:prstGeom>
-          <a:noFill/>
-          <a:ln/>
-        </p:spPr>
-        <p:txBody>
-          <a:bodyPr wrap="square" lIns="0" tIns="0" rIns="0" bIns="0" rtlCol="0" anchor="t"/>
-          <a:lstStyle/>
-          <a:p>
-            <a:pPr algn="l" indent="0" marL="0">
-              <a:lnSpc>
-                <a:spcPts val="1680"/>
-              </a:lnSpc>
-              <a:buNone/>
-            </a:pPr>
-            <a:r>
-              <a:rPr lang="en-US" sz="1200" dirty="0">
-                <a:solidFill>
-                  <a:srgbClr val="5B6677"/>
-                </a:solidFill>
-                <a:latin typeface="Noto Sans SC" pitchFamily="34" charset="0"/>
-                <a:ea typeface="Noto Sans SC" pitchFamily="34" charset="-122"/>
-                <a:cs typeface="Noto Sans SC" pitchFamily="34" charset="-120"/>
-              </a:rPr>
-              <a:t>2. Class </a:t>
-            </a:r>
-            <a:pPr algn="l" indent="0" marL="0">
-              <a:lnSpc>
-                <a:spcPts val="1680"/>
-              </a:lnSpc>
-              <a:buNone/>
-            </a:pPr>
-            <a:r>
-              <a:rPr lang="en-US" sz="1200" b="1" dirty="0">
-                <a:solidFill>
-                  <a:srgbClr val="1E2A38"/>
-                </a:solidFill>
-                <a:latin typeface="Noto Sans SC" pitchFamily="34" charset="0"/>
-                <a:ea typeface="Noto Sans SC" pitchFamily="34" charset="-122"/>
-                <a:cs typeface="Noto Sans SC" pitchFamily="34" charset="-120"/>
-              </a:rPr>
               <a:t>chorally says pinyin + English</a:t>
             </a:r>
-            <a:pPr algn="l" indent="0" marL="0">
-              <a:lnSpc>
-                <a:spcPts val="1680"/>
-              </a:lnSpc>
-              <a:buNone/>
-            </a:pPr>
             <a:r>
               <a:rPr lang="en-US" sz="1200" dirty="0">
                 <a:solidFill>
@@ -7379,12 +7238,6 @@
               </a:rPr>
               <a:t>"This is our </a:t>
             </a:r>
-            <a:pPr algn="l" indent="0" marL="0">
-              <a:lnSpc>
-                <a:spcPts val="1750"/>
-              </a:lnSpc>
-              <a:buNone/>
-            </a:pPr>
             <a:r>
               <a:rPr lang="en-US" sz="1250" b="1" dirty="0">
                 <a:solidFill>
@@ -7396,12 +7249,6 @@
               </a:rPr>
               <a:t>last Sports lesson</a:t>
             </a:r>
-            <a:pPr algn="l" indent="0" marL="0">
-              <a:lnSpc>
-                <a:spcPts val="1750"/>
-              </a:lnSpc>
-              <a:buNone/>
-            </a:pPr>
             <a:r>
               <a:rPr lang="en-US" sz="1250" dirty="0">
                 <a:solidFill>
@@ -7413,12 +7260,6 @@
               </a:rPr>
               <a:t> before the test. Today we pull every piece — </a:t>
             </a:r>
-            <a:pPr algn="l" indent="0" marL="0">
-              <a:lnSpc>
-                <a:spcPts val="1750"/>
-              </a:lnSpc>
-              <a:buNone/>
-            </a:pPr>
             <a:r>
               <a:rPr lang="en-US" sz="1250" b="1" dirty="0">
                 <a:solidFill>
@@ -7430,12 +7271,6 @@
               </a:rPr>
               <a:t>speaking, listening, and writing</a:t>
             </a:r>
-            <a:pPr algn="l" indent="0" marL="0">
-              <a:lnSpc>
-                <a:spcPts val="1750"/>
-              </a:lnSpc>
-              <a:buNone/>
-            </a:pPr>
             <a:r>
               <a:rPr lang="en-US" sz="1250" dirty="0">
                 <a:solidFill>
@@ -7829,12 +7664,6 @@
               </a:rPr>
               <a:t>We are learning to combine everything from this unit — </a:t>
             </a:r>
-            <a:pPr algn="l" indent="0" marL="0">
-              <a:spcBef>
-                <a:spcPts val="400"/>
-              </a:spcBef>
-              <a:buNone/>
-            </a:pPr>
             <a:r>
               <a:rPr lang="en-US" sz="1400" b="1" dirty="0">
                 <a:solidFill>
@@ -7846,12 +7675,6 @@
               </a:rPr>
               <a:t>sports, TV/movies, frequency, and 但是</a:t>
             </a:r>
-            <a:pPr algn="l" indent="0" marL="0">
-              <a:spcBef>
-                <a:spcPts val="400"/>
-              </a:spcBef>
-              <a:buNone/>
-            </a:pPr>
             <a:r>
               <a:rPr lang="en-US" sz="1400" dirty="0">
                 <a:solidFill>
@@ -7978,12 +7801,6 @@
               </a:rPr>
               <a:t>I can hold a </a:t>
             </a:r>
-            <a:pPr algn="l" indent="0" marL="0">
-              <a:lnSpc>
-                <a:spcPts val="1750"/>
-              </a:lnSpc>
-              <a:buNone/>
-            </a:pPr>
             <a:r>
               <a:rPr lang="en-US" sz="1250" b="1" dirty="0">
                 <a:solidFill>
@@ -7995,12 +7812,6 @@
               </a:rPr>
               <a:t>6-question hobby conversation</a:t>
             </a:r>
-            <a:pPr algn="l" indent="0" marL="0">
-              <a:lnSpc>
-                <a:spcPts val="1750"/>
-              </a:lnSpc>
-              <a:buNone/>
-            </a:pPr>
             <a:r>
               <a:rPr lang="en-US" sz="1250" dirty="0">
                 <a:solidFill>
@@ -8012,12 +7823,6 @@
               </a:rPr>
               <a:t> using </a:t>
             </a:r>
-            <a:pPr algn="l" indent="0" marL="0">
-              <a:lnSpc>
-                <a:spcPts val="1750"/>
-              </a:lnSpc>
-              <a:buNone/>
-            </a:pPr>
             <a:r>
               <a:rPr lang="en-US" sz="1250" dirty="0">
                 <a:solidFill>
@@ -8144,12 +7949,6 @@
               </a:rPr>
               <a:t>I can </a:t>
             </a:r>
-            <a:pPr algn="l" indent="0" marL="0">
-              <a:lnSpc>
-                <a:spcPts val="1750"/>
-              </a:lnSpc>
-              <a:buNone/>
-            </a:pPr>
             <a:r>
               <a:rPr lang="en-US" sz="1250" b="1" dirty="0">
                 <a:solidFill>
@@ -8161,12 +7960,6 @@
               </a:rPr>
               <a:t>understand spoken descriptions</a:t>
             </a:r>
-            <a:pPr algn="l" indent="0" marL="0">
-              <a:lnSpc>
-                <a:spcPts val="1750"/>
-              </a:lnSpc>
-              <a:buNone/>
-            </a:pPr>
             <a:r>
               <a:rPr lang="en-US" sz="1250" dirty="0">
                 <a:solidFill>
@@ -8178,12 +7971,6 @@
               </a:rPr>
               <a:t> of people's sport habits </a:t>
             </a:r>
-            <a:pPr algn="l" indent="0" marL="0">
-              <a:lnSpc>
-                <a:spcPts val="1750"/>
-              </a:lnSpc>
-              <a:buNone/>
-            </a:pPr>
             <a:r>
               <a:rPr lang="en-US" sz="1250" i="1" dirty="0">
                 <a:solidFill>
@@ -8310,12 +8097,6 @@
               </a:rPr>
               <a:t>I can </a:t>
             </a:r>
-            <a:pPr algn="l" indent="0" marL="0">
-              <a:lnSpc>
-                <a:spcPts val="1750"/>
-              </a:lnSpc>
-              <a:buNone/>
-            </a:pPr>
             <a:r>
               <a:rPr lang="en-US" sz="1250" b="1" dirty="0">
                 <a:solidFill>
@@ -8327,12 +8108,6 @@
               </a:rPr>
               <a:t>write the key Test 3.2 sentences</a:t>
             </a:r>
-            <a:pPr algn="l" indent="0" marL="0">
-              <a:lnSpc>
-                <a:spcPts val="1750"/>
-              </a:lnSpc>
-              <a:buNone/>
-            </a:pPr>
             <a:r>
               <a:rPr lang="en-US" sz="1250" dirty="0">
                 <a:solidFill>
@@ -9168,9 +8943,6 @@
               </a:rPr>
               <a:t>会 (huì) = </a:t>
             </a:r>
-            <a:pPr algn="l" indent="0" marL="0">
-              <a:buNone/>
-            </a:pPr>
             <a:r>
               <a:rPr lang="en-US" sz="1300" b="1" dirty="0">
                 <a:solidFill>
@@ -9182,9 +8954,6 @@
               </a:rPr>
               <a:t>ability/skill</a:t>
             </a:r>
-            <a:pPr algn="l" indent="0" marL="0">
-              <a:buNone/>
-            </a:pPr>
             <a:r>
               <a:rPr lang="en-US" sz="1300" dirty="0">
                 <a:solidFill>
@@ -9397,15 +9166,6 @@
               </a:rPr>
               <a:t>Test 3.2's vocabulary list also includes </a:t>
             </a:r>
-            <a:pPr algn="l" indent="0" marL="0">
-              <a:lnSpc>
-                <a:spcPts val="1425"/>
-              </a:lnSpc>
-              <a:spcBef>
-                <a:spcPts val="300"/>
-              </a:spcBef>
-              <a:buNone/>
-            </a:pPr>
             <a:r>
               <a:rPr lang="en-US" sz="950" b="1" dirty="0">
                 <a:solidFill>
@@ -9417,15 +9177,6 @@
               </a:rPr>
               <a:t>长跑, 短跑, 走路, 游泳池, 水球, 通常, 大家</a:t>
             </a:r>
-            <a:pPr algn="l" indent="0" marL="0">
-              <a:lnSpc>
-                <a:spcPts val="1425"/>
-              </a:lnSpc>
-              <a:spcBef>
-                <a:spcPts val="300"/>
-              </a:spcBef>
-              <a:buNone/>
-            </a:pPr>
             <a:r>
               <a:rPr lang="en-US" sz="950" dirty="0">
                 <a:solidFill>
@@ -9437,15 +9188,6 @@
               </a:rPr>
               <a:t> and the phrase </a:t>
             </a:r>
-            <a:pPr algn="l" indent="0" marL="0">
-              <a:lnSpc>
-                <a:spcPts val="1425"/>
-              </a:lnSpc>
-              <a:spcBef>
-                <a:spcPts val="300"/>
-              </a:spcBef>
-              <a:buNone/>
-            </a:pPr>
             <a:r>
               <a:rPr lang="en-US" sz="950" b="1" dirty="0">
                 <a:solidFill>
@@ -9457,15 +9199,6 @@
               </a:rPr>
               <a:t>打得不太好</a:t>
             </a:r>
-            <a:pPr algn="l" indent="0" marL="0">
-              <a:lnSpc>
-                <a:spcPts val="1425"/>
-              </a:lnSpc>
-              <a:spcBef>
-                <a:spcPts val="300"/>
-              </a:spcBef>
-              <a:buNone/>
-            </a:pPr>
             <a:r>
               <a:rPr lang="en-US" sz="950" dirty="0">
                 <a:solidFill>
@@ -9477,15 +9210,6 @@
               </a:rPr>
               <a:t> — from the </a:t>
             </a:r>
-            <a:pPr algn="l" indent="0" marL="0">
-              <a:lnSpc>
-                <a:spcPts val="1425"/>
-              </a:lnSpc>
-              <a:spcBef>
-                <a:spcPts val="300"/>
-              </a:spcBef>
-              <a:buNone/>
-            </a:pPr>
             <a:r>
               <a:rPr lang="en-US" sz="950" b="1" dirty="0">
                 <a:solidFill>
@@ -9497,15 +9221,6 @@
               </a:rPr>
               <a:t>workbook</a:t>
             </a:r>
-            <a:pPr algn="l" indent="0" marL="0">
-              <a:lnSpc>
-                <a:spcPts val="1425"/>
-              </a:lnSpc>
-              <a:spcBef>
-                <a:spcPts val="300"/>
-              </a:spcBef>
-              <a:buNone/>
-            </a:pPr>
             <a:r>
               <a:rPr lang="en-US" sz="950" dirty="0">
                 <a:solidFill>
@@ -9875,9 +9590,6 @@
               </a:rPr>
               <a:t>我</a:t>
             </a:r>
-            <a:pPr algn="l" indent="0" marL="0">
-              <a:buNone/>
-            </a:pPr>
             <a:r>
               <a:rPr lang="en-US" sz="1600" b="1" dirty="0">
                 <a:solidFill>
@@ -9889,9 +9601,6 @@
               </a:rPr>
               <a:t>差不多</a:t>
             </a:r>
-            <a:pPr algn="l" indent="0" marL="0">
-              <a:buNone/>
-            </a:pPr>
             <a:r>
               <a:rPr lang="en-US" sz="1600" dirty="0">
                 <a:solidFill>
@@ -10013,9 +9722,6 @@
               </a:rPr>
               <a:t>我</a:t>
             </a:r>
-            <a:pPr algn="l" indent="0" marL="0">
-              <a:buNone/>
-            </a:pPr>
             <a:r>
               <a:rPr lang="en-US" sz="1600" b="1" dirty="0">
                 <a:solidFill>
@@ -10027,9 +9733,6 @@
               </a:rPr>
               <a:t>不太喜欢</a:t>
             </a:r>
-            <a:pPr algn="l" indent="0" marL="0">
-              <a:buNone/>
-            </a:pPr>
             <a:r>
               <a:rPr lang="en-US" sz="1600" dirty="0">
                 <a:solidFill>
@@ -10151,9 +9854,6 @@
               </a:rPr>
               <a:t>Harry</a:t>
             </a:r>
-            <a:pPr algn="l" indent="0" marL="0">
-              <a:buNone/>
-            </a:pPr>
             <a:r>
               <a:rPr lang="en-US" sz="1600" b="1" dirty="0">
                 <a:solidFill>
@@ -10165,9 +9865,6 @@
               </a:rPr>
               <a:t>常常</a:t>
             </a:r>
-            <a:pPr algn="l" indent="0" marL="0">
-              <a:buNone/>
-            </a:pPr>
             <a:r>
               <a:rPr lang="en-US" sz="1600" dirty="0">
                 <a:solidFill>
@@ -10293,9 +9990,6 @@
               </a:rPr>
               <a:t>Tom跟Jerry一起去打乒乓球，</a:t>
             </a:r>
-            <a:pPr algn="l" indent="0" marL="0">
-              <a:buNone/>
-            </a:pPr>
             <a:r>
               <a:rPr lang="en-US" sz="1400" b="1" dirty="0">
                 <a:solidFill>
@@ -10307,9 +10001,6 @@
               </a:rPr>
               <a:t>但是</a:t>
             </a:r>
-            <a:pPr algn="l" indent="0" marL="0">
-              <a:buNone/>
-            </a:pPr>
             <a:r>
               <a:rPr lang="en-US" sz="1400" dirty="0">
                 <a:solidFill>
@@ -10321,9 +10012,6 @@
               </a:rPr>
               <a:t>Tom</a:t>
             </a:r>
-            <a:pPr algn="l" indent="0" marL="0">
-              <a:buNone/>
-            </a:pPr>
             <a:r>
               <a:rPr lang="en-US" sz="1400" b="1" dirty="0">
                 <a:solidFill>
@@ -10335,9 +10023,6 @@
               </a:rPr>
               <a:t>打得不太好</a:t>
             </a:r>
-            <a:pPr algn="l" indent="0" marL="0">
-              <a:buNone/>
-            </a:pPr>
             <a:r>
               <a:rPr lang="en-US" sz="1400" dirty="0">
                 <a:solidFill>
@@ -10349,9 +10034,6 @@
               </a:rPr>
               <a:t>。 </a:t>
             </a:r>
-            <a:pPr algn="l" indent="0" marL="0">
-              <a:buNone/>
-            </a:pPr>
             <a:r>
               <a:rPr lang="en-US" sz="800" b="1" dirty="0">
                 <a:solidFill>
@@ -11062,9 +10744,6 @@
               </a:rPr>
               <a:t>Quick translate: </a:t>
             </a:r>
-            <a:pPr algn="l" indent="0" marL="0">
-              <a:buNone/>
-            </a:pPr>
             <a:r>
               <a:rPr lang="en-US" sz="1400" b="1" i="1" dirty="0">
                 <a:solidFill>
@@ -11076,9 +10755,6 @@
               </a:rPr>
               <a:t>"I can't really play basketball."</a:t>
             </a:r>
-            <a:pPr algn="l" indent="0" marL="0">
-              <a:buNone/>
-            </a:pPr>
             <a:r>
               <a:rPr lang="en-US" sz="1400" dirty="0">
                 <a:solidFill>
@@ -11278,9 +10954,6 @@
               </a:rPr>
               <a:t>Thumbs up if </a:t>
             </a:r>
-            <a:pPr algn="l" indent="0" marL="0">
-              <a:buNone/>
-            </a:pPr>
             <a:r>
               <a:rPr lang="en-US" sz="1600" b="1" dirty="0">
                 <a:solidFill>
@@ -11292,9 +10965,6 @@
               </a:rPr>
               <a:t>会</a:t>
             </a:r>
-            <a:pPr algn="l" indent="0" marL="0">
-              <a:buNone/>
-            </a:pPr>
             <a:r>
               <a:rPr lang="en-US" sz="1400" dirty="0">
                 <a:solidFill>
@@ -11494,9 +11164,6 @@
               </a:rPr>
               <a:t>Which of the 4 key sentences uses </a:t>
             </a:r>
-            <a:pPr algn="l" indent="0" marL="0">
-              <a:buNone/>
-            </a:pPr>
             <a:r>
               <a:rPr lang="en-US" sz="1500" b="1" dirty="0">
                 <a:solidFill>
@@ -11508,9 +11175,6 @@
               </a:rPr>
               <a:t>跟……一起</a:t>
             </a:r>
-            <a:pPr algn="l" indent="0" marL="0">
-              <a:buNone/>
-            </a:pPr>
             <a:r>
               <a:rPr lang="en-US" sz="1400" dirty="0">
                 <a:solidFill>
@@ -13042,6 +12706,53 @@
               </a:rPr>
               <a:t>1. In pairs, </a:t>
             </a:r>
+            <a:r>
+              <a:rPr lang="en-US" sz="1150" b="1" dirty="0">
+                <a:solidFill>
+                  <a:srgbClr val="1E2A38"/>
+                </a:solidFill>
+                <a:latin typeface="Noto Sans SC" pitchFamily="34" charset="0"/>
+                <a:ea typeface="Noto Sans SC" pitchFamily="34" charset="-122"/>
+                <a:cs typeface="Noto Sans SC" pitchFamily="34" charset="-120"/>
+              </a:rPr>
+              <a:t>ask and answer 6 hobby questions</a:t>
+            </a:r>
+            <a:r>
+              <a:rPr lang="en-US" sz="1150" dirty="0">
+                <a:solidFill>
+                  <a:srgbClr val="5B6677"/>
+                </a:solidFill>
+                <a:latin typeface="Noto Sans SC" pitchFamily="34" charset="0"/>
+                <a:ea typeface="Noto Sans SC" pitchFamily="34" charset="-122"/>
+                <a:cs typeface="Noto Sans SC" pitchFamily="34" charset="-120"/>
+              </a:rPr>
+              <a:t> using the unit's reference words</a:t>
+            </a:r>
+            <a:endParaRPr lang="en-US" sz="1150" dirty="0"/>
+          </a:p>
+        </p:txBody>
+      </p:sp>
+      <p:sp>
+        <p:nvSpPr>
+          <p:cNvPr id="16" name="Text 14"/>
+          <p:cNvSpPr/>
+          <p:nvPr/>
+        </p:nvSpPr>
+        <p:spPr>
+          <a:xfrm>
+            <a:off x="644426" y="2456111"/>
+            <a:ext cx="5214187" cy="408682"/>
+          </a:xfrm>
+          <a:prstGeom prst="rect">
+            <a:avLst/>
+          </a:prstGeom>
+          <a:noFill/>
+          <a:ln/>
+        </p:spPr>
+        <p:txBody>
+          <a:bodyPr wrap="square" lIns="0" tIns="0" rIns="0" bIns="0" rtlCol="0" anchor="t"/>
+          <a:lstStyle/>
+          <a:p>
             <a:pPr algn="l" indent="0" marL="0">
               <a:lnSpc>
                 <a:spcPts val="1610"/>
@@ -13049,6 +12760,17 @@
               <a:buNone/>
             </a:pPr>
             <a:r>
+              <a:rPr lang="en-US" sz="1150" dirty="0">
+                <a:solidFill>
+                  <a:srgbClr val="5B6677"/>
+                </a:solidFill>
+                <a:latin typeface="Noto Sans SC" pitchFamily="34" charset="0"/>
+                <a:ea typeface="Noto Sans SC" pitchFamily="34" charset="-122"/>
+                <a:cs typeface="Noto Sans SC" pitchFamily="34" charset="-120"/>
+              </a:rPr>
+              <a:t>2. Use </a:t>
+            </a:r>
+            <a:r>
               <a:rPr lang="en-US" sz="1150" b="1" dirty="0">
                 <a:solidFill>
                   <a:srgbClr val="1E2A38"/>
@@ -13057,8 +12779,44 @@
                 <a:ea typeface="Noto Sans SC" pitchFamily="34" charset="-122"/>
                 <a:cs typeface="Noto Sans SC" pitchFamily="34" charset="-120"/>
               </a:rPr>
-              <a:t>ask and answer 6 hobby questions</a:t>
-            </a:r>
+              <a:t>经常/常常, 差不多, 每个周末, 但是, 不太喜欢, 会/不太会</a:t>
+            </a:r>
+            <a:r>
+              <a:rPr lang="en-US" sz="1150" dirty="0">
+                <a:solidFill>
+                  <a:srgbClr val="5B6677"/>
+                </a:solidFill>
+                <a:latin typeface="Noto Sans SC" pitchFamily="34" charset="0"/>
+                <a:ea typeface="Noto Sans SC" pitchFamily="34" charset="-122"/>
+                <a:cs typeface="Noto Sans SC" pitchFamily="34" charset="-120"/>
+              </a:rPr>
+              <a:t> in your answers</a:t>
+            </a:r>
+            <a:endParaRPr lang="en-US" sz="1150" dirty="0"/>
+          </a:p>
+        </p:txBody>
+      </p:sp>
+      <p:sp>
+        <p:nvSpPr>
+          <p:cNvPr id="17" name="Text 15"/>
+          <p:cNvSpPr/>
+          <p:nvPr/>
+        </p:nvSpPr>
+        <p:spPr>
+          <a:xfrm>
+            <a:off x="644426" y="2966293"/>
+            <a:ext cx="5214187" cy="408682"/>
+          </a:xfrm>
+          <a:prstGeom prst="rect">
+            <a:avLst/>
+          </a:prstGeom>
+          <a:noFill/>
+          <a:ln/>
+        </p:spPr>
+        <p:txBody>
+          <a:bodyPr wrap="square" lIns="0" tIns="0" rIns="0" bIns="0" rtlCol="0" anchor="t"/>
+          <a:lstStyle/>
+          <a:p>
             <a:pPr algn="l" indent="0" marL="0">
               <a:lnSpc>
                 <a:spcPts val="1610"/>
@@ -13074,56 +12832,8 @@
                 <a:ea typeface="Noto Sans SC" pitchFamily="34" charset="-122"/>
                 <a:cs typeface="Noto Sans SC" pitchFamily="34" charset="-120"/>
               </a:rPr>
-              <a:t> using the unit's reference words</a:t>
-            </a:r>
-            <a:endParaRPr lang="en-US" sz="1150" dirty="0"/>
-          </a:p>
-        </p:txBody>
-      </p:sp>
-      <p:sp>
-        <p:nvSpPr>
-          <p:cNvPr id="16" name="Text 14"/>
-          <p:cNvSpPr/>
-          <p:nvPr/>
-        </p:nvSpPr>
-        <p:spPr>
-          <a:xfrm>
-            <a:off x="644426" y="2456111"/>
-            <a:ext cx="5214187" cy="408682"/>
-          </a:xfrm>
-          <a:prstGeom prst="rect">
-            <a:avLst/>
-          </a:prstGeom>
-          <a:noFill/>
-          <a:ln/>
-        </p:spPr>
-        <p:txBody>
-          <a:bodyPr wrap="square" lIns="0" tIns="0" rIns="0" bIns="0" rtlCol="0" anchor="t"/>
-          <a:lstStyle/>
-          <a:p>
-            <a:pPr algn="l" indent="0" marL="0">
-              <a:lnSpc>
-                <a:spcPts val="1610"/>
-              </a:lnSpc>
-              <a:buNone/>
-            </a:pPr>
-            <a:r>
-              <a:rPr lang="en-US" sz="1150" dirty="0">
-                <a:solidFill>
-                  <a:srgbClr val="5B6677"/>
-                </a:solidFill>
-                <a:latin typeface="Noto Sans SC" pitchFamily="34" charset="0"/>
-                <a:ea typeface="Noto Sans SC" pitchFamily="34" charset="-122"/>
-                <a:cs typeface="Noto Sans SC" pitchFamily="34" charset="-120"/>
-              </a:rPr>
-              <a:t>2. Use </a:t>
-            </a:r>
-            <a:pPr algn="l" indent="0" marL="0">
-              <a:lnSpc>
-                <a:spcPts val="1610"/>
-              </a:lnSpc>
-              <a:buNone/>
-            </a:pPr>
+              <a:t>3. </a:t>
+            </a:r>
             <a:r>
               <a:rPr lang="en-US" sz="1150" b="1" dirty="0">
                 <a:solidFill>
@@ -13133,90 +12843,8 @@
                 <a:ea typeface="Noto Sans SC" pitchFamily="34" charset="-122"/>
                 <a:cs typeface="Noto Sans SC" pitchFamily="34" charset="-120"/>
               </a:rPr>
-              <a:t>经常/常常, 差不多, 每个周末, 但是, 不太喜欢, 会/不太会</a:t>
-            </a:r>
-            <a:pPr algn="l" indent="0" marL="0">
-              <a:lnSpc>
-                <a:spcPts val="1610"/>
-              </a:lnSpc>
-              <a:buNone/>
-            </a:pPr>
-            <a:r>
-              <a:rPr lang="en-US" sz="1150" dirty="0">
-                <a:solidFill>
-                  <a:srgbClr val="5B6677"/>
-                </a:solidFill>
-                <a:latin typeface="Noto Sans SC" pitchFamily="34" charset="0"/>
-                <a:ea typeface="Noto Sans SC" pitchFamily="34" charset="-122"/>
-                <a:cs typeface="Noto Sans SC" pitchFamily="34" charset="-120"/>
-              </a:rPr>
-              <a:t> in your answers</a:t>
-            </a:r>
-            <a:endParaRPr lang="en-US" sz="1150" dirty="0"/>
-          </a:p>
-        </p:txBody>
-      </p:sp>
-      <p:sp>
-        <p:nvSpPr>
-          <p:cNvPr id="17" name="Text 15"/>
-          <p:cNvSpPr/>
-          <p:nvPr/>
-        </p:nvSpPr>
-        <p:spPr>
-          <a:xfrm>
-            <a:off x="644426" y="2966293"/>
-            <a:ext cx="5214187" cy="408682"/>
-          </a:xfrm>
-          <a:prstGeom prst="rect">
-            <a:avLst/>
-          </a:prstGeom>
-          <a:noFill/>
-          <a:ln/>
-        </p:spPr>
-        <p:txBody>
-          <a:bodyPr wrap="square" lIns="0" tIns="0" rIns="0" bIns="0" rtlCol="0" anchor="t"/>
-          <a:lstStyle/>
-          <a:p>
-            <a:pPr algn="l" indent="0" marL="0">
-              <a:lnSpc>
-                <a:spcPts val="1610"/>
-              </a:lnSpc>
-              <a:buNone/>
-            </a:pPr>
-            <a:r>
-              <a:rPr lang="en-US" sz="1150" dirty="0">
-                <a:solidFill>
-                  <a:srgbClr val="5B6677"/>
-                </a:solidFill>
-                <a:latin typeface="Noto Sans SC" pitchFamily="34" charset="0"/>
-                <a:ea typeface="Noto Sans SC" pitchFamily="34" charset="-122"/>
-                <a:cs typeface="Noto Sans SC" pitchFamily="34" charset="-120"/>
-              </a:rPr>
-              <a:t>3. </a:t>
-            </a:r>
-            <a:pPr algn="l" indent="0" marL="0">
-              <a:lnSpc>
-                <a:spcPts val="1610"/>
-              </a:lnSpc>
-              <a:buNone/>
-            </a:pPr>
-            <a:r>
-              <a:rPr lang="en-US" sz="1150" b="1" dirty="0">
-                <a:solidFill>
-                  <a:srgbClr val="1E2A38"/>
-                </a:solidFill>
-                <a:latin typeface="Noto Sans SC" pitchFamily="34" charset="0"/>
-                <a:ea typeface="Noto Sans SC" pitchFamily="34" charset="-122"/>
-                <a:cs typeface="Noto Sans SC" pitchFamily="34" charset="-120"/>
-              </a:rPr>
               <a:t>2–3 pairs report</a:t>
             </a:r>
-            <a:pPr algn="l" indent="0" marL="0">
-              <a:lnSpc>
-                <a:spcPts val="1610"/>
-              </a:lnSpc>
-              <a:buNone/>
-            </a:pPr>
             <a:r>
               <a:rPr lang="en-US" sz="1150" dirty="0">
                 <a:solidFill>
@@ -13338,9 +12966,6 @@
               </a:rPr>
               <a:t>经常 / 常常 </a:t>
             </a:r>
-            <a:pPr algn="l" indent="0" marL="0">
-              <a:buNone/>
-            </a:pPr>
             <a:r>
               <a:rPr lang="en-US" sz="900" b="1" dirty="0">
                 <a:solidFill>
@@ -13369,9 +12994,6 @@
               </a:rPr>
               <a:t>差不多 </a:t>
             </a:r>
-            <a:pPr algn="l" indent="0" marL="0">
-              <a:buNone/>
-            </a:pPr>
             <a:r>
               <a:rPr lang="en-US" sz="900" b="1" dirty="0">
                 <a:solidFill>
@@ -13400,9 +13022,6 @@
               </a:rPr>
               <a:t>每个周末 </a:t>
             </a:r>
-            <a:pPr algn="l" indent="0" marL="0">
-              <a:buNone/>
-            </a:pPr>
             <a:r>
               <a:rPr lang="en-US" sz="900" b="1" dirty="0">
                 <a:solidFill>
@@ -13431,9 +13050,6 @@
               </a:rPr>
               <a:t>但是 </a:t>
             </a:r>
-            <a:pPr algn="l" indent="0" marL="0">
-              <a:buNone/>
-            </a:pPr>
             <a:r>
               <a:rPr lang="en-US" sz="900" b="1" dirty="0">
                 <a:solidFill>
@@ -13462,9 +13078,6 @@
               </a:rPr>
               <a:t>不太喜欢 </a:t>
             </a:r>
-            <a:pPr algn="l" indent="0" marL="0">
-              <a:buNone/>
-            </a:pPr>
             <a:r>
               <a:rPr lang="en-US" sz="900" b="1" dirty="0">
                 <a:solidFill>
@@ -13493,9 +13106,6 @@
               </a:rPr>
               <a:t>会 / 不太会 </a:t>
             </a:r>
-            <a:pPr algn="l" indent="0" marL="0">
-              <a:buNone/>
-            </a:pPr>
             <a:r>
               <a:rPr lang="en-US" sz="900" b="1" dirty="0">
                 <a:solidFill>
@@ -14588,12 +14198,6 @@
               </a:rPr>
               <a:t>Listen</a:t>
             </a:r>
-            <a:pPr algn="l" indent="0" marL="0">
-              <a:lnSpc>
-                <a:spcPts val="1470"/>
-              </a:lnSpc>
-              <a:buNone/>
-            </a:pPr>
             <a:r>
               <a:rPr lang="en-US" sz="1050" dirty="0">
                 <a:solidFill>
@@ -14605,12 +14209,6 @@
               </a:rPr>
               <a:t> — you will hear </a:t>
             </a:r>
-            <a:pPr algn="l" indent="0" marL="0">
-              <a:lnSpc>
-                <a:spcPts val="1470"/>
-              </a:lnSpc>
-              <a:buNone/>
-            </a:pPr>
             <a:r>
               <a:rPr lang="en-US" sz="1050" b="1" dirty="0">
                 <a:solidFill>
@@ -14622,12 +14220,6 @@
               </a:rPr>
               <a:t>6 short items</a:t>
             </a:r>
-            <a:pPr algn="l" indent="0" marL="0">
-              <a:lnSpc>
-                <a:spcPts val="1470"/>
-              </a:lnSpc>
-              <a:buNone/>
-            </a:pPr>
             <a:r>
               <a:rPr lang="en-US" sz="1050" dirty="0">
                 <a:solidFill>
@@ -14756,12 +14348,6 @@
               </a:rPr>
               <a:t>Circle</a:t>
             </a:r>
-            <a:pPr algn="l" indent="0" marL="0">
-              <a:lnSpc>
-                <a:spcPts val="1470"/>
-              </a:lnSpc>
-              <a:buNone/>
-            </a:pPr>
             <a:r>
               <a:rPr lang="en-US" sz="1050" dirty="0">
                 <a:solidFill>
@@ -14890,12 +14476,6 @@
               </a:rPr>
               <a:t>Self-mark</a:t>
             </a:r>
-            <a:pPr algn="l" indent="0" marL="0">
-              <a:lnSpc>
-                <a:spcPts val="1470"/>
-              </a:lnSpc>
-              <a:buNone/>
-            </a:pPr>
             <a:r>
               <a:rPr lang="en-US" sz="1050" dirty="0">
                 <a:solidFill>
